--- a/reports/midsem/presentation.pptx
+++ b/reports/midsem/presentation.pptx
@@ -22,7 +22,6 @@
     <p:sldId id="270" r:id="rId16"/>
     <p:sldId id="271" r:id="rId17"/>
     <p:sldId id="272" r:id="rId18"/>
-    <p:sldId id="273" r:id="rId19"/>
     <p:sldId id="274" r:id="rId20"/>
     <p:sldId id="275" r:id="rId21"/>
     <p:sldId id="276" r:id="rId22"/>
@@ -10829,7 +10828,7 @@
                 <a:ea typeface="Cambria" pitchFamily="34" charset="-122"/>
                 <a:cs typeface="Cambria" pitchFamily="34" charset="-120"/>
               </a:rPr>
-              <a:t>Physical Discovery: Why Vehicle Tilt Controls Drift</a:t>
+              <a:t>Feature Relationships in the Current 2 s Data</a:t>
             </a:r>
             <a:endParaRPr lang="en-US" sz="2700" dirty="0"/>
           </a:p>
@@ -11117,7 +11116,7 @@
                 <a:ea typeface="Calibri" pitchFamily="34" charset="-122"/>
                 <a:cs typeface="Calibri" pitchFamily="34" charset="-120"/>
               </a:rPr>
-              <a:t>• az_mean (r = −0.88)</a:t>
+              <a:t>• ax_mean / ax_rms: r ≈ +0.88 / +0.87</a:t>
             </a:r>
             <a:endParaRPr lang="en-US" sz="1500" dirty="0"/>
           </a:p>
@@ -11140,7 +11139,7 @@
                 <a:ea typeface="Calibri" pitchFamily="34" charset="-122"/>
                 <a:cs typeface="Calibri" pitchFamily="34" charset="-120"/>
               </a:rPr>
-              <a:t>• ax_rms (r = 0.87)</a:t>
+              <a:t>• az_mean / az_rms: r ≈ +0.88 / −0.87</a:t>
             </a:r>
             <a:endParaRPr lang="en-US" sz="1500" dirty="0"/>
           </a:p>
@@ -11163,7 +11162,7 @@
                 <a:ea typeface="Calibri" pitchFamily="34" charset="-122"/>
                 <a:cs typeface="Calibri" pitchFamily="34" charset="-120"/>
               </a:rPr>
-              <a:t>Top Random Forest importance features: az_mean, az_rms, ax_rms.</a:t>
+              <a:t>Pooled Random Forest ranking: az_max, az_min, ax_mean.</a:t>
             </a:r>
             <a:endParaRPr lang="en-US" sz="1500" dirty="0"/>
           </a:p>
@@ -11186,7 +11185,7 @@
                 <a:ea typeface="Calibri" pitchFamily="34" charset="-122"/>
                 <a:cs typeface="Calibri" pitchFamily="34" charset="-120"/>
               </a:rPr>
-              <a:t>Accelerometer mean measures tilt relative to gravity. With 95% of drift from bias, tilt controls how vertical bias projects into horizontal position error. Spectral entropy correlates at r ≈ 0.65–0.74.</a:t>
+              <a:t>Acceleration means reflect orientation and motion. Bias projection is a plausible explanation, not proven causation. Accel spectral entropy: r ≈ 0.64–0.74.</a:t>
             </a:r>
             <a:endParaRPr lang="en-US" sz="1500" dirty="0"/>
           </a:p>
@@ -11329,7 +11328,7 @@
                 <a:ea typeface="Calibri" pitchFamily="34" charset="-122"/>
                 <a:cs typeface="Calibri" pitchFamily="34" charset="-120"/>
               </a:rPr>
-              <a:t>22 feature pairs exceed |r| &gt; 0.95 (e.g. variance vs. standard deviation, RMS vs. mean). Unregularized linear regression can suffer weight explosion. This motivates L1 regularization (Lasso) to prune redundant features.</a:t>
+              <a:t>25 feature pairs exceed |r| &gt; 0.95 (e.g. variance vs. standard deviation, RMS vs. mean). Unregularized linear regression can suffer weight explosion. This motivates L1 regularization (Lasso) to prune redundant features.</a:t>
             </a:r>
             <a:endParaRPr lang="en-US" sz="1350" dirty="0"/>
           </a:p>
@@ -17481,7 +17480,7 @@
                 <a:ea typeface="Calibri" pitchFamily="34" charset="-122"/>
                 <a:cs typeface="Calibri" pitchFamily="34" charset="-120"/>
               </a:rPr>
-              <a:t>45% error reduction: baseline 4.53 cm → 2.50 cm.</a:t>
+              <a:t>44.7% lower prediction MAE: baseline 4.53 cm → 2.50 cm.</a:t>
             </a:r>
             <a:endParaRPr lang="en-US" sz="1450" dirty="0"/>
           </a:p>
@@ -17504,7 +17503,7 @@
                 <a:ea typeface="Calibri" pitchFamily="34" charset="-122"/>
                 <a:cs typeface="Calibri" pitchFamily="34" charset="-120"/>
               </a:rPr>
-              <a:t>Explains 76% of drift variation on unseen flights (R² = 0.76; peaks at 0.84 on MH_02).</a:t>
+              <a:t>Mean held-out R² = 0.756; MH_02: 0.837. Two-flight development evaluation.</a:t>
             </a:r>
             <a:endParaRPr lang="en-US" sz="1450" dirty="0"/>
           </a:p>
@@ -17550,7 +17549,7 @@
                 <a:ea typeface="Calibri" pitchFamily="34" charset="-122"/>
                 <a:cs typeface="Calibri" pitchFamily="34" charset="-120"/>
               </a:rPr>
-              <a:t>Prunes 104 features to 7–18 core descriptors: az_mean, ax_rms, gx_max, gy_mean, gz_dom_freq, az_spec_entropy, corr_ax_az.</a:t>
+              <a:t>Lasso keeps 18 of 104 features when trained on MH_02 and 40 on MH_01; 9 occur in both folds, including accelerometer means and RMS.</a:t>
             </a:r>
             <a:endParaRPr lang="en-US" sz="1450" dirty="0"/>
           </a:p>
@@ -19589,7 +19588,7 @@
                 <a:ea typeface="Calibri" pitchFamily="34" charset="-122"/>
                 <a:cs typeface="Calibri" pitchFamily="34" charset="-120"/>
               </a:rPr>
-              <a:t>System Rigor, Team Matrix, and Deep Learning Trajectory Correction</a:t>
+              <a:t>System Rigor, Team Matrix, and Proposed Phase 2 Work</a:t>
             </a:r>
             <a:endParaRPr lang="en-US" sz="2100" dirty="0"/>
           </a:p>
@@ -19667,7 +19666,7 @@
                 <a:ea typeface="Calibri" pitchFamily="34" charset="-122"/>
                 <a:cs typeface="Calibri" pitchFamily="34" charset="-120"/>
               </a:rPr>
-              <a:t>19</a:t>
+              <a:t>18</a:t>
             </a:r>
             <a:endParaRPr lang="en-US" sz="1100" dirty="0"/>
           </a:p>
@@ -20661,7 +20660,7 @@
                 <a:ea typeface="Calibri" pitchFamily="34" charset="-122"/>
                 <a:cs typeface="Calibri" pitchFamily="34" charset="-120"/>
               </a:rPr>
-              <a:t>20</a:t>
+              <a:t>19</a:t>
             </a:r>
             <a:endParaRPr lang="en-US" sz="1100" dirty="0"/>
           </a:p>
@@ -20784,7 +20783,7 @@
                 <a:ea typeface="Calibri" pitchFamily="34" charset="-122"/>
                 <a:cs typeface="Calibri" pitchFamily="34" charset="-120"/>
               </a:rPr>
-              <a:t>AUTOMATED PYTEST VERIFICATION</a:t>
+              <a:t>AUTOMATED VERIFICATION: 43 TESTS PASSED</a:t>
             </a:r>
             <a:endParaRPr lang="en-US" sz="1250" dirty="0"/>
           </a:p>
@@ -20852,7 +20851,7 @@
                 <a:ea typeface="Calibri" pitchFamily="34" charset="-122"/>
                 <a:cs typeface="Calibri" pitchFamily="34" charset="-120"/>
               </a:rPr>
-              <a:t>test_windowing.py: guarantees exactly 400 rows and zero NaNs per window.</a:t>
+              <a:t>test_windowing.py: checks row counts and tensor shape on synthetic 1 s windows.</a:t>
             </a:r>
             <a:endParaRPr lang="en-US" sz="1350" dirty="0"/>
           </a:p>
@@ -20875,7 +20874,7 @@
                 <a:ea typeface="Calibri" pitchFamily="34" charset="-122"/>
                 <a:cs typeface="Calibri" pitchFamily="34" charset="-120"/>
               </a:rPr>
-              <a:t>test_label_sanity.py: confirms error grows monotonically from 0.25 s to 2.0 s.</a:t>
+              <a:t>test_label_sanity.py: checks short/long-window error, calibration and bias subtraction on MH_01.</a:t>
             </a:r>
             <a:endParaRPr lang="en-US" sz="1350" dirty="0"/>
           </a:p>
@@ -21041,7 +21040,7 @@
                 <a:ea typeface="Calibri" pitchFamily="34" charset="-122"/>
                 <a:cs typeface="Calibri" pitchFamily="34" charset="-120"/>
               </a:rPr>
-              <a:t>Mourikis &amp; Roumeliotis (ICRA 2007): MSCKF VIO drift formulation.</a:t>
+              <a:t>Woodman (2007): inertial navigation and sensor-error growth.</a:t>
             </a:r>
             <a:endParaRPr lang="en-US" sz="1350" dirty="0"/>
           </a:p>
@@ -21220,7 +21219,7 @@
                 <a:ea typeface="Calibri" pitchFamily="34" charset="-122"/>
                 <a:cs typeface="Calibri" pitchFamily="34" charset="-120"/>
               </a:rPr>
-              <a:t>PHASE 2 DEEP LEARNING ROADMAP (END-SEMESTER)</a:t>
+              <a:t>PROPOSED PHASE 2 ROADMAP</a:t>
             </a:r>
             <a:endParaRPr lang="en-US" sz="1250" dirty="0"/>
           </a:p>
@@ -21262,7 +21261,7 @@
                 <a:ea typeface="Calibri" pitchFamily="34" charset="-122"/>
                 <a:cs typeface="Calibri" pitchFamily="34" charset="-120"/>
               </a:rPr>
-              <a:t>1. Scale to all 11 EuRoC sequences (Medium &amp; Difficult aggressive flights).</a:t>
+              <a:t>1. Freeze the pipeline and evaluate additional untouched EuRoC flights.</a:t>
             </a:r>
             <a:endParaRPr lang="en-US" sz="1300" dirty="0"/>
           </a:p>
@@ -21279,7 +21278,7 @@
                 <a:ea typeface="Calibri" pitchFamily="34" charset="-122"/>
                 <a:cs typeface="Calibri" pitchFamily="34" charset="-120"/>
               </a:rPr>
-              <a:t>2. Train 1D-CNNs and LSTMs directly on raw (N, 400, 6) window tensors.</a:t>
+              <a:t>2. Compare physics, nonlinear and temporal models on matched splits.</a:t>
             </a:r>
             <a:endParaRPr lang="en-US" sz="1300" dirty="0"/>
           </a:p>
@@ -21321,7 +21320,7 @@
                 <a:ea typeface="Calibri" pitchFamily="34" charset="-122"/>
                 <a:cs typeface="Calibri" pitchFamily="34" charset="-120"/>
               </a:rPr>
-              <a:t>3. Build a Hybrid ML-DL model fusing physics features with neural embeddings.</a:t>
+              <a:t>3. Predict signed axis errors and test realistic starting-state uncertainty.</a:t>
             </a:r>
             <a:endParaRPr lang="en-US" sz="1300" dirty="0"/>
           </a:p>
@@ -21338,7 +21337,7 @@
                 <a:ea typeface="Calibri" pitchFamily="34" charset="-122"/>
                 <a:cs typeface="Calibri" pitchFamily="34" charset="-120"/>
               </a:rPr>
-              <a:t>4. Closed-loop trajectory correction evaluated via Absolute Trajectory Error (ATE) using the evo library.</a:t>
+              <a:t>4. Apply corrections and measure whether continuous trajectory error improves.</a:t>
             </a:r>
             <a:endParaRPr lang="en-US" sz="1300" dirty="0"/>
           </a:p>
@@ -22520,7 +22519,7 @@
                 <a:ea typeface="Calibri" pitchFamily="34" charset="-122"/>
                 <a:cs typeface="Calibri" pitchFamily="34" charset="-120"/>
               </a:rPr>
-              <a:t>21</a:t>
+              <a:t>20</a:t>
             </a:r>
             <a:endParaRPr lang="en-US" sz="1100" dirty="0"/>
           </a:p>
@@ -22618,7 +22617,7 @@
                 <a:ea typeface="Calibri" pitchFamily="34" charset="-122"/>
                 <a:cs typeface="Calibri" pitchFamily="34" charset="-120"/>
               </a:rPr>
-              <a:t>IEEE-STYLE PROJECT REPORT</a:t>
+              <a:t>PROJECT REPORT</a:t>
             </a:r>
             <a:endParaRPr lang="en-US" sz="1250" dirty="0"/>
           </a:p>
@@ -22805,7 +22804,7 @@
                 <a:ea typeface="Calibri" pitchFamily="34" charset="-122"/>
                 <a:cs typeface="Calibri" pitchFamily="34" charset="-120"/>
               </a:rPr>
-              <a:t>Open the report  →</a:t>
+              <a:t>Open the report online  →</a:t>
             </a:r>
             <a:endParaRPr lang="en-US" sz="2000" dirty="0"/>
           </a:p>
@@ -22844,7 +22843,7 @@
                 <a:ea typeface="Calibri" pitchFamily="34" charset="-122"/>
                 <a:cs typeface="Calibri" pitchFamily="34" charset="-120"/>
               </a:rPr>
-              <a:t>Click the button or the report cover to open it</a:t>
+              <a:t>Click the button or report cover to open the attached report online.</a:t>
             </a:r>
             <a:endParaRPr lang="en-US" sz="1150" dirty="0"/>
           </a:p>
@@ -23729,7 +23728,7 @@
                 <a:ea typeface="Calibri" pitchFamily="34" charset="-122"/>
                 <a:cs typeface="Calibri" pitchFamily="34" charset="-120"/>
               </a:rPr>
-              <a:t>22</a:t>
+              <a:t>21</a:t>
             </a:r>
             <a:endParaRPr lang="en-US" sz="1100" dirty="0"/>
           </a:p>
@@ -31451,7 +31450,7 @@
                 <a:ea typeface="Calibri" pitchFamily="34" charset="-122"/>
                 <a:cs typeface="Calibri" pitchFamily="34" charset="-120"/>
               </a:rPr>
-              <a:t>Nearest timestamp within 20 ms. Dropped 1.17% (MH_01) and 1.32% (MH_02), only at entry/exit; zero mid-flight drops.</a:t>
+              <a:t>Nearest timestamp within 20 ms. Dropped 431 rows (1.17%) on MH_01 and 400 (1.32%) on MH_02 due to unmatched reference coverage.</a:t>
             </a:r>
             <a:endParaRPr lang="en-US" sz="1650" dirty="0"/>
           </a:p>
@@ -31737,7 +31736,7 @@
                 <a:ea typeface="Calibri" pitchFamily="34" charset="-122"/>
                 <a:cs typeface="Calibri" pitchFamily="34" charset="-120"/>
               </a:rPr>
-              <a:t>2.0 s windows (400 samples), advancing 0.25 s (50 samples); 1,312 training windows total.</a:t>
+              <a:t>2.0 s windows (400 samples), advancing 0.25 s (50 samples); 1,312 windows total across both flights.</a:t>
             </a:r>
             <a:endParaRPr lang="en-US" sz="1650" dirty="0"/>
           </a:p>
@@ -31880,7 +31879,7 @@
                 <a:ea typeface="Calibri" pitchFamily="34" charset="-122"/>
                 <a:cs typeface="Calibri" pitchFamily="34" charset="-120"/>
               </a:rPr>
-              <a:t>Subtract window mean before FFT to remove the 9.81 m/s² gravity DC spike and isolate vibration/aerodynamic oscillations.</a:t>
+              <a:t>Subtract each channel’s mean before FFT to suppress its DC offset and analyse time-varying signal frequencies.</a:t>
             </a:r>
             <a:endParaRPr lang="en-US" sz="1650" dirty="0"/>
           </a:p>
@@ -34208,7 +34207,7 @@
                 <a:ea typeface="Calibri" pitchFamily="34" charset="-122"/>
                 <a:cs typeface="Calibri" pitchFamily="34" charset="-120"/>
               </a:rPr>
-              <a:t>physics_leave_MH_01/02.csv — 1,312 rows, 6 cols (analytical benchmark)</a:t>
+              <a:t>physics_leave_MH_01_easy.csv / MH_02_easy.csv — each 1,312 rows, 6 cols (diagnostic)</a:t>
             </a:r>
             <a:endParaRPr lang="en-US" sz="1250" dirty="0"/>
           </a:p>
@@ -34364,7 +34363,7 @@
                 <a:ea typeface="Calibri" pitchFamily="34" charset="-122"/>
                 <a:cs typeface="Calibri" pitchFamily="34" charset="-120"/>
               </a:rPr>
-              <a:t>95% SENSOR BIAS DISCOVERY</a:t>
+              <a:t>BIAS-CORRECTION DIAGNOSTIC</a:t>
             </a:r>
             <a:endParaRPr lang="en-US" sz="1250" dirty="0"/>
           </a:p>
@@ -34409,7 +34408,7 @@
                 <a:ea typeface="Calibri" pitchFamily="34" charset="-122"/>
                 <a:cs typeface="Calibri" pitchFamily="34" charset="-120"/>
               </a:rPr>
-              <a:t>Raw IMU drift averages 1.21 m. Subtracting sensor bias (err_mag_m_bc) reduces error to 0.058 m (5.8 cm).</a:t>
+              <a:t>Raw mean drift: 1.215 / 1.203 m (MH_01 / MH_02). Reference bias subtraction reduces it to 0.063 / 0.054 m.</a:t>
             </a:r>
             <a:endParaRPr lang="en-US" sz="1450" dirty="0"/>
           </a:p>
@@ -34432,7 +34431,7 @@
                 <a:ea typeface="Calibri" pitchFamily="34" charset="-122"/>
                 <a:cs typeface="Calibri" pitchFamily="34" charset="-120"/>
               </a:rPr>
-              <a:t>≈95% of raw dead-reckoning drift is caused by constant sensor bias, not random motion.</a:t>
+              <a:t>About 95% lower mean magnitude indicates a strong bias contribution; it is not an exact causal split.</a:t>
             </a:r>
             <a:endParaRPr lang="en-US" sz="1450" dirty="0"/>
           </a:p>
